--- a/smoke_samples/09_charts.pptx
+++ b/smoke_samples/09_charts.pptx
@@ -1707,7 +1707,7 @@
         <p:spPr>
           <a:xfrm>
             <a:off x="457200" y="274638"/>
-            <a:ext cx="8230200" cy="1143000"/>
+            <a:ext cx="8229600" cy="1143000"/>
           </a:xfrm>
           <a:prstGeom prst="rect">
             <a:avLst/>
@@ -1720,7 +1720,7 @@
           <a:p>
             <a:pPr algn="l"/>
             <a:r>
-              <a:rPr lang="en-US" sz="4400" b="1" i="0" dirty="0"/>
+              <a:rPr lang="en-US" sz="4400" b="0" i="0" u="none" dirty="0"/>
               <a:t>Bar Chart</a:t>
             </a:r>
           </a:p>
@@ -1781,7 +1781,7 @@
         <p:spPr>
           <a:xfrm>
             <a:off x="457200" y="274638"/>
-            <a:ext cx="8230200" cy="1143000"/>
+            <a:ext cx="8229600" cy="1143000"/>
           </a:xfrm>
           <a:prstGeom prst="rect">
             <a:avLst/>
@@ -1794,7 +1794,7 @@
           <a:p>
             <a:pPr algn="l"/>
             <a:r>
-              <a:rPr lang="en-US" sz="4400" b="1" i="0" dirty="0"/>
+              <a:rPr lang="en-US" sz="4400" b="0" i="0" u="none" dirty="0"/>
               <a:t>Stock HLC Chart</a:t>
             </a:r>
           </a:p>
@@ -1855,7 +1855,7 @@
         <p:spPr>
           <a:xfrm>
             <a:off x="457200" y="274638"/>
-            <a:ext cx="8230200" cy="1143000"/>
+            <a:ext cx="8229600" cy="1143000"/>
           </a:xfrm>
           <a:prstGeom prst="rect">
             <a:avLst/>
@@ -1868,7 +1868,7 @@
           <a:p>
             <a:pPr algn="l"/>
             <a:r>
-              <a:rPr lang="en-US" sz="4400" b="1" i="0" dirty="0"/>
+              <a:rPr lang="en-US" sz="4400" b="0" i="0" u="none" dirty="0"/>
               <a:t>Stock OHLC Chart</a:t>
             </a:r>
           </a:p>
@@ -1929,7 +1929,7 @@
         <p:spPr>
           <a:xfrm>
             <a:off x="457200" y="274638"/>
-            <a:ext cx="8230200" cy="1143000"/>
+            <a:ext cx="8229600" cy="1143000"/>
           </a:xfrm>
           <a:prstGeom prst="rect">
             <a:avLst/>
@@ -1942,7 +1942,7 @@
           <a:p>
             <a:pPr algn="l"/>
             <a:r>
-              <a:rPr lang="en-US" sz="4400" b="1" i="0" dirty="0"/>
+              <a:rPr lang="en-US" sz="4400" b="0" i="0" u="none" dirty="0"/>
               <a:t>Combo Chart</a:t>
             </a:r>
           </a:p>
@@ -2003,7 +2003,7 @@
         <p:spPr>
           <a:xfrm>
             <a:off x="457200" y="274638"/>
-            <a:ext cx="8230200" cy="1143000"/>
+            <a:ext cx="8229600" cy="1143000"/>
           </a:xfrm>
           <a:prstGeom prst="rect">
             <a:avLst/>
@@ -2016,7 +2016,7 @@
           <a:p>
             <a:pPr algn="l"/>
             <a:r>
-              <a:rPr lang="en-US" sz="4400" b="1" i="0" dirty="0"/>
+              <a:rPr lang="en-US" sz="4400" b="0" i="0" u="none" dirty="0"/>
               <a:t>Line Chart</a:t>
             </a:r>
           </a:p>
@@ -2077,7 +2077,7 @@
         <p:spPr>
           <a:xfrm>
             <a:off x="457200" y="274638"/>
-            <a:ext cx="8230200" cy="1143000"/>
+            <a:ext cx="8229600" cy="1143000"/>
           </a:xfrm>
           <a:prstGeom prst="rect">
             <a:avLst/>
@@ -2090,7 +2090,7 @@
           <a:p>
             <a:pPr algn="l"/>
             <a:r>
-              <a:rPr lang="en-US" sz="4400" b="1" i="0" dirty="0"/>
+              <a:rPr lang="en-US" sz="4400" b="0" i="0" u="none" dirty="0"/>
               <a:t>Pie Chart</a:t>
             </a:r>
           </a:p>
@@ -2151,7 +2151,7 @@
         <p:spPr>
           <a:xfrm>
             <a:off x="457200" y="274638"/>
-            <a:ext cx="8230200" cy="1143000"/>
+            <a:ext cx="8229600" cy="1143000"/>
           </a:xfrm>
           <a:prstGeom prst="rect">
             <a:avLst/>
@@ -2164,7 +2164,7 @@
           <a:p>
             <a:pPr algn="l"/>
             <a:r>
-              <a:rPr lang="en-US" sz="4400" b="1" i="0" dirty="0"/>
+              <a:rPr lang="en-US" sz="4400" b="0" i="0" u="none" dirty="0"/>
               <a:t>Doughnut Chart</a:t>
             </a:r>
           </a:p>
@@ -2225,7 +2225,7 @@
         <p:spPr>
           <a:xfrm>
             <a:off x="457200" y="274638"/>
-            <a:ext cx="8230200" cy="1143000"/>
+            <a:ext cx="8229600" cy="1143000"/>
           </a:xfrm>
           <a:prstGeom prst="rect">
             <a:avLst/>
@@ -2238,7 +2238,7 @@
           <a:p>
             <a:pPr algn="l"/>
             <a:r>
-              <a:rPr lang="en-US" sz="4400" b="1" i="0" dirty="0"/>
+              <a:rPr lang="en-US" sz="4400" b="0" i="0" u="none" dirty="0"/>
               <a:t>Scatter Chart</a:t>
             </a:r>
           </a:p>
@@ -2299,7 +2299,7 @@
         <p:spPr>
           <a:xfrm>
             <a:off x="457200" y="274638"/>
-            <a:ext cx="8230200" cy="1143000"/>
+            <a:ext cx="8229600" cy="1143000"/>
           </a:xfrm>
           <a:prstGeom prst="rect">
             <a:avLst/>
@@ -2312,7 +2312,7 @@
           <a:p>
             <a:pPr algn="l"/>
             <a:r>
-              <a:rPr lang="en-US" sz="4400" b="1" i="0" dirty="0"/>
+              <a:rPr lang="en-US" sz="4400" b="0" i="0" u="none" dirty="0"/>
               <a:t>Area Chart</a:t>
             </a:r>
           </a:p>
@@ -2373,7 +2373,7 @@
         <p:spPr>
           <a:xfrm>
             <a:off x="457200" y="274638"/>
-            <a:ext cx="8230200" cy="1143000"/>
+            <a:ext cx="8229600" cy="1143000"/>
           </a:xfrm>
           <a:prstGeom prst="rect">
             <a:avLst/>
@@ -2386,7 +2386,7 @@
           <a:p>
             <a:pPr algn="l"/>
             <a:r>
-              <a:rPr lang="en-US" sz="4400" b="1" i="0" dirty="0"/>
+              <a:rPr lang="en-US" sz="4400" b="0" i="0" u="none" dirty="0"/>
               <a:t>Radar Chart</a:t>
             </a:r>
           </a:p>
@@ -2447,7 +2447,7 @@
         <p:spPr>
           <a:xfrm>
             <a:off x="457200" y="274638"/>
-            <a:ext cx="8230200" cy="1143000"/>
+            <a:ext cx="8229600" cy="1143000"/>
           </a:xfrm>
           <a:prstGeom prst="rect">
             <a:avLst/>
@@ -2460,7 +2460,7 @@
           <a:p>
             <a:pPr algn="l"/>
             <a:r>
-              <a:rPr lang="en-US" sz="4400" b="1" i="0" dirty="0"/>
+              <a:rPr lang="en-US" sz="4400" b="0" i="0" u="none" dirty="0"/>
               <a:t>Radar Chart (Filled)</a:t>
             </a:r>
           </a:p>
@@ -2521,7 +2521,7 @@
         <p:spPr>
           <a:xfrm>
             <a:off x="457200" y="274638"/>
-            <a:ext cx="8230200" cy="1143000"/>
+            <a:ext cx="8229600" cy="1143000"/>
           </a:xfrm>
           <a:prstGeom prst="rect">
             <a:avLst/>
@@ -2534,7 +2534,7 @@
           <a:p>
             <a:pPr algn="l"/>
             <a:r>
-              <a:rPr lang="en-US" sz="4400" b="1" i="0" dirty="0"/>
+              <a:rPr lang="en-US" sz="4400" b="0" i="0" u="none" dirty="0"/>
               <a:t>Bubble Chart</a:t>
             </a:r>
           </a:p>

--- a/smoke_samples/09_charts.pptx
+++ b/smoke_samples/09_charts.pptx
@@ -1679,11 +1679,6 @@
 <file path=ppt/slides/slide1.xml><?xml version="1.0" encoding="utf-8"?>
 <p:sld xmlns:a="http://schemas.openxmlformats.org/drawingml/2006/main" xmlns:c="http://schemas.openxmlformats.org/drawingml/2006/chart" xmlns:r="http://schemas.openxmlformats.org/officeDocument/2006/relationships" xmlns:p="http://schemas.openxmlformats.org/presentationml/2006/main">
   <p:cSld>
-    <p:bg>
-      <p:bgRef idx="1001">
-        <a:schemeClr val="bg1"/>
-      </p:bgRef>
-    </p:bg>
     <p:spTree>
       <p:nvGrpSpPr>
         <p:cNvPr id="1" name=""/>
@@ -1753,11 +1748,6 @@
 <file path=ppt/slides/slide10.xml><?xml version="1.0" encoding="utf-8"?>
 <p:sld xmlns:a="http://schemas.openxmlformats.org/drawingml/2006/main" xmlns:c="http://schemas.openxmlformats.org/drawingml/2006/chart" xmlns:r="http://schemas.openxmlformats.org/officeDocument/2006/relationships" xmlns:p="http://schemas.openxmlformats.org/presentationml/2006/main">
   <p:cSld>
-    <p:bg>
-      <p:bgRef idx="1001">
-        <a:schemeClr val="bg1"/>
-      </p:bgRef>
-    </p:bg>
     <p:spTree>
       <p:nvGrpSpPr>
         <p:cNvPr id="1" name=""/>
@@ -1827,11 +1817,6 @@
 <file path=ppt/slides/slide11.xml><?xml version="1.0" encoding="utf-8"?>
 <p:sld xmlns:a="http://schemas.openxmlformats.org/drawingml/2006/main" xmlns:c="http://schemas.openxmlformats.org/drawingml/2006/chart" xmlns:r="http://schemas.openxmlformats.org/officeDocument/2006/relationships" xmlns:p="http://schemas.openxmlformats.org/presentationml/2006/main">
   <p:cSld>
-    <p:bg>
-      <p:bgRef idx="1001">
-        <a:schemeClr val="bg1"/>
-      </p:bgRef>
-    </p:bg>
     <p:spTree>
       <p:nvGrpSpPr>
         <p:cNvPr id="1" name=""/>
@@ -1901,11 +1886,6 @@
 <file path=ppt/slides/slide12.xml><?xml version="1.0" encoding="utf-8"?>
 <p:sld xmlns:a="http://schemas.openxmlformats.org/drawingml/2006/main" xmlns:c="http://schemas.openxmlformats.org/drawingml/2006/chart" xmlns:r="http://schemas.openxmlformats.org/officeDocument/2006/relationships" xmlns:p="http://schemas.openxmlformats.org/presentationml/2006/main">
   <p:cSld>
-    <p:bg>
-      <p:bgRef idx="1001">
-        <a:schemeClr val="bg1"/>
-      </p:bgRef>
-    </p:bg>
     <p:spTree>
       <p:nvGrpSpPr>
         <p:cNvPr id="1" name=""/>
@@ -1975,11 +1955,6 @@
 <file path=ppt/slides/slide2.xml><?xml version="1.0" encoding="utf-8"?>
 <p:sld xmlns:a="http://schemas.openxmlformats.org/drawingml/2006/main" xmlns:c="http://schemas.openxmlformats.org/drawingml/2006/chart" xmlns:r="http://schemas.openxmlformats.org/officeDocument/2006/relationships" xmlns:p="http://schemas.openxmlformats.org/presentationml/2006/main">
   <p:cSld>
-    <p:bg>
-      <p:bgRef idx="1001">
-        <a:schemeClr val="bg1"/>
-      </p:bgRef>
-    </p:bg>
     <p:spTree>
       <p:nvGrpSpPr>
         <p:cNvPr id="1" name=""/>
@@ -2049,11 +2024,6 @@
 <file path=ppt/slides/slide3.xml><?xml version="1.0" encoding="utf-8"?>
 <p:sld xmlns:a="http://schemas.openxmlformats.org/drawingml/2006/main" xmlns:c="http://schemas.openxmlformats.org/drawingml/2006/chart" xmlns:r="http://schemas.openxmlformats.org/officeDocument/2006/relationships" xmlns:p="http://schemas.openxmlformats.org/presentationml/2006/main">
   <p:cSld>
-    <p:bg>
-      <p:bgRef idx="1001">
-        <a:schemeClr val="bg1"/>
-      </p:bgRef>
-    </p:bg>
     <p:spTree>
       <p:nvGrpSpPr>
         <p:cNvPr id="1" name=""/>
@@ -2123,11 +2093,6 @@
 <file path=ppt/slides/slide4.xml><?xml version="1.0" encoding="utf-8"?>
 <p:sld xmlns:a="http://schemas.openxmlformats.org/drawingml/2006/main" xmlns:c="http://schemas.openxmlformats.org/drawingml/2006/chart" xmlns:r="http://schemas.openxmlformats.org/officeDocument/2006/relationships" xmlns:p="http://schemas.openxmlformats.org/presentationml/2006/main">
   <p:cSld>
-    <p:bg>
-      <p:bgRef idx="1001">
-        <a:schemeClr val="bg1"/>
-      </p:bgRef>
-    </p:bg>
     <p:spTree>
       <p:nvGrpSpPr>
         <p:cNvPr id="1" name=""/>
@@ -2197,11 +2162,6 @@
 <file path=ppt/slides/slide5.xml><?xml version="1.0" encoding="utf-8"?>
 <p:sld xmlns:a="http://schemas.openxmlformats.org/drawingml/2006/main" xmlns:c="http://schemas.openxmlformats.org/drawingml/2006/chart" xmlns:r="http://schemas.openxmlformats.org/officeDocument/2006/relationships" xmlns:p="http://schemas.openxmlformats.org/presentationml/2006/main">
   <p:cSld>
-    <p:bg>
-      <p:bgRef idx="1001">
-        <a:schemeClr val="bg1"/>
-      </p:bgRef>
-    </p:bg>
     <p:spTree>
       <p:nvGrpSpPr>
         <p:cNvPr id="1" name=""/>
@@ -2271,11 +2231,6 @@
 <file path=ppt/slides/slide6.xml><?xml version="1.0" encoding="utf-8"?>
 <p:sld xmlns:a="http://schemas.openxmlformats.org/drawingml/2006/main" xmlns:c="http://schemas.openxmlformats.org/drawingml/2006/chart" xmlns:r="http://schemas.openxmlformats.org/officeDocument/2006/relationships" xmlns:p="http://schemas.openxmlformats.org/presentationml/2006/main">
   <p:cSld>
-    <p:bg>
-      <p:bgRef idx="1001">
-        <a:schemeClr val="bg1"/>
-      </p:bgRef>
-    </p:bg>
     <p:spTree>
       <p:nvGrpSpPr>
         <p:cNvPr id="1" name=""/>
@@ -2345,11 +2300,6 @@
 <file path=ppt/slides/slide7.xml><?xml version="1.0" encoding="utf-8"?>
 <p:sld xmlns:a="http://schemas.openxmlformats.org/drawingml/2006/main" xmlns:c="http://schemas.openxmlformats.org/drawingml/2006/chart" xmlns:r="http://schemas.openxmlformats.org/officeDocument/2006/relationships" xmlns:p="http://schemas.openxmlformats.org/presentationml/2006/main">
   <p:cSld>
-    <p:bg>
-      <p:bgRef idx="1001">
-        <a:schemeClr val="bg1"/>
-      </p:bgRef>
-    </p:bg>
     <p:spTree>
       <p:nvGrpSpPr>
         <p:cNvPr id="1" name=""/>
@@ -2419,11 +2369,6 @@
 <file path=ppt/slides/slide8.xml><?xml version="1.0" encoding="utf-8"?>
 <p:sld xmlns:a="http://schemas.openxmlformats.org/drawingml/2006/main" xmlns:c="http://schemas.openxmlformats.org/drawingml/2006/chart" xmlns:r="http://schemas.openxmlformats.org/officeDocument/2006/relationships" xmlns:p="http://schemas.openxmlformats.org/presentationml/2006/main">
   <p:cSld>
-    <p:bg>
-      <p:bgRef idx="1001">
-        <a:schemeClr val="bg1"/>
-      </p:bgRef>
-    </p:bg>
     <p:spTree>
       <p:nvGrpSpPr>
         <p:cNvPr id="1" name=""/>
@@ -2493,11 +2438,6 @@
 <file path=ppt/slides/slide9.xml><?xml version="1.0" encoding="utf-8"?>
 <p:sld xmlns:a="http://schemas.openxmlformats.org/drawingml/2006/main" xmlns:c="http://schemas.openxmlformats.org/drawingml/2006/chart" xmlns:r="http://schemas.openxmlformats.org/officeDocument/2006/relationships" xmlns:p="http://schemas.openxmlformats.org/presentationml/2006/main">
   <p:cSld>
-    <p:bg>
-      <p:bgRef idx="1001">
-        <a:schemeClr val="bg1"/>
-      </p:bgRef>
-    </p:bg>
     <p:spTree>
       <p:nvGrpSpPr>
         <p:cNvPr id="1" name=""/>
@@ -2565,9 +2505,9 @@
 </file>
 
 <file path=ppt/theme/theme1.xml><?xml version="1.0" encoding="utf-8"?>
-<a:theme xmlns:a="http://schemas.openxmlformats.org/drawingml/2006/main" name="Office Theme">
+<a:theme xmlns:a="http://schemas.openxmlformats.org/drawingml/2006/main" name="Office Theme marketing">
   <a:themeElements>
-    <a:clrScheme name="Office">
+    <a:clrScheme name="Office colors">
       <a:dk1>
         <a:sysClr val="windowText" lastClr="000000"/>
       </a:dk1>
@@ -2605,7 +2545,7 @@
         <a:srgbClr val="800080"/>
       </a:folHlink>
     </a:clrScheme>
-    <a:fontScheme name="Office">
+    <a:fontScheme name="Office fonts">
       <a:majorFont>
         <a:latin typeface="Calibri"/>
         <a:ea typeface=""/>
